--- a/第一次报告/课堂报告1.pptx
+++ b/第一次报告/课堂报告1.pptx
@@ -5,7 +5,7 @@
     <p:sldMasterId id="2147483648" r:id="rId1"/>
   </p:sldMasterIdLst>
   <p:notesMasterIdLst>
-    <p:notesMasterId r:id="rId12"/>
+    <p:notesMasterId r:id="rId11"/>
   </p:notesMasterIdLst>
   <p:sldIdLst>
     <p:sldId id="256" r:id="rId2"/>
@@ -15,9 +15,8 @@
     <p:sldId id="260" r:id="rId6"/>
     <p:sldId id="261" r:id="rId7"/>
     <p:sldId id="262" r:id="rId8"/>
-    <p:sldId id="263" r:id="rId9"/>
-    <p:sldId id="264" r:id="rId10"/>
-    <p:sldId id="265" r:id="rId11"/>
+    <p:sldId id="264" r:id="rId9"/>
+    <p:sldId id="265" r:id="rId10"/>
   </p:sldIdLst>
   <p:sldSz cx="12192000" cy="6858000"/>
   <p:notesSz cx="6858000" cy="9144000"/>
@@ -116,6 +115,11 @@
       </a:defRPr>
     </a:lvl9pPr>
   </p:defaultTextStyle>
+  <p:extLst>
+    <p:ext uri="{EFAFB233-063F-42B5-8137-9DF3F51BA10A}">
+      <p15:sldGuideLst xmlns:p15="http://schemas.microsoft.com/office/powerpoint/2012/main"/>
+    </p:ext>
+  </p:extLst>
 </p:presentation>
 </file>
 
@@ -375,91 +379,6 @@
 </p:notes>
 </file>
 
-<file path=ppt/notesSlides/notesSlide10.xml><?xml version="1.0" encoding="utf-8"?>
-<p:notes xmlns:a="http://schemas.openxmlformats.org/drawingml/2006/main" xmlns:r="http://schemas.openxmlformats.org/officeDocument/2006/relationships" xmlns:p="http://schemas.openxmlformats.org/presentationml/2006/main">
-  <p:cSld>
-    <p:spTree>
-      <p:nvGrpSpPr>
-        <p:cNvPr id="1" name=""/>
-        <p:cNvGrpSpPr/>
-        <p:nvPr/>
-      </p:nvGrpSpPr>
-      <p:grpSpPr>
-        <a:xfrm>
-          <a:off x="0" y="0"/>
-          <a:ext cx="0" cy="0"/>
-          <a:chOff x="0" y="0"/>
-          <a:chExt cx="0" cy="0"/>
-        </a:xfrm>
-      </p:grpSpPr>
-      <p:sp>
-        <p:nvSpPr>
-          <p:cNvPr id="2" name="Slide Image Placeholder 1"/>
-          <p:cNvSpPr>
-            <a:spLocks noGrp="1" noRot="1" noChangeAspect="1"/>
-          </p:cNvSpPr>
-          <p:nvPr>
-            <p:ph type="sldImg"/>
-          </p:nvPr>
-        </p:nvSpPr>
-        <p:spPr/>
-      </p:sp>
-      <p:sp>
-        <p:nvSpPr>
-          <p:cNvPr id="3" name="Notes Placeholder 2"/>
-          <p:cNvSpPr>
-            <a:spLocks noGrp="1"/>
-          </p:cNvSpPr>
-          <p:nvPr>
-            <p:ph type="body" idx="1"/>
-          </p:nvPr>
-        </p:nvSpPr>
-        <p:spPr/>
-        <p:txBody>
-          <a:bodyPr/>
-          <a:lstStyle/>
-          <a:p>
-            <a:r>
-              <a:t>Livelife 还在从原型走向真实服务的过程中，但方向很明确：让地点、时间和个人需求重新连起来，让校园信息不再等人翻找。谢谢大家。</a:t>
-            </a:r>
-          </a:p>
-          <a:p>
-            <a:endParaRPr/>
-          </a:p>
-          <a:p>
-            <a:r>
-              <a:t>资料：仓库 README.md、docs/architecture.md；封面图为本次原创生成的概念视觉。</a:t>
-            </a:r>
-          </a:p>
-        </p:txBody>
-      </p:sp>
-      <p:sp>
-        <p:nvSpPr>
-          <p:cNvPr id="4" name="Slide Number Placeholder 3"/>
-          <p:cNvSpPr>
-            <a:spLocks noGrp="1"/>
-          </p:cNvSpPr>
-          <p:nvPr>
-            <p:ph type="sldNum" idx="5"/>
-          </p:nvPr>
-        </p:nvSpPr>
-        <p:spPr/>
-        <p:txBody>
-          <a:bodyPr/>
-          <a:lstStyle/>
-          <a:p>
-            <a:endParaRPr/>
-          </a:p>
-        </p:txBody>
-      </p:sp>
-    </p:spTree>
-  </p:cSld>
-  <p:clrMapOvr>
-    <a:masterClrMapping/>
-  </p:clrMapOvr>
-</p:notes>
-</file>
-
 <file path=ppt/notesSlides/notesSlide2.xml><?xml version="1.0" encoding="utf-8"?>
 <p:notes xmlns:a="http://schemas.openxmlformats.org/drawingml/2006/main" xmlns:r="http://schemas.openxmlformats.org/officeDocument/2006/relationships" xmlns:p="http://schemas.openxmlformats.org/presentationml/2006/main">
   <p:cSld>
@@ -1015,7 +934,7 @@
           <a:lstStyle/>
           <a:p>
             <a:r>
-              <a:t>后端负责把页面背后的信息做成服务。现在先从 FastAPI 的 hello 接口开始，验证浏览器能否真正访问后端。Pydantic 用来约束接口数据格式。后续 PostgreSQL 保存持久数据，SQLAlchemy 让 Python 更方便地读写它，Alembic 记录表结构变化。信息采集、去重、推荐和提醒则放进独立 Worker，在后台运行，避免让用户点一下页面就一直等待。</a:t>
+              <a:t>我们的协作围绕 GitHub 的 Issue 和 PR 展开。现场先看贡献指南、工程规范、协作流程和 AI 开发指南，再看 Project 的状态、负责人、优先级和 Milestone，最后看任务拆分与 Actions。强调：构建请求成功只代表请求发出，真实检查和部署要看对应状态和环境记录。</a:t>
             </a:r>
           </a:p>
           <a:p>
@@ -1023,7 +942,7 @@
           </a:p>
           <a:p>
             <a:r>
-              <a:t>资料：docs/engineering.md、docs/architecture.md：技术路线、后续目标架构与模块边界。</a:t>
+              <a:t>资料：CONTRIBUTING.md、docs/workflow.md、docs/ai-development.md、docs/deployment.md、.github/workflows/。</a:t>
             </a:r>
           </a:p>
         </p:txBody>
@@ -1100,7 +1019,7 @@
           <a:lstStyle/>
           <a:p>
             <a:r>
-              <a:t>我们的协作围绕 GitHub 的 Issue 和 PR 展开。现场先看贡献指南、工程规范、协作流程和 AI 开发指南，再看 Project 的状态、负责人、优先级和 Milestone，最后看任务拆分与 Actions。强调：构建请求成功只代表请求发出，真实检查和部署要看对应状态和环境记录。</a:t>
+              <a:t>Livelife 还在从原型走向真实服务的过程中，但方向很明确：让地点、时间和个人需求重新连起来，让校园信息不再等人翻找。谢谢大家。</a:t>
             </a:r>
           </a:p>
           <a:p>
@@ -1108,7 +1027,7 @@
           </a:p>
           <a:p>
             <a:r>
-              <a:t>资料：CONTRIBUTING.md、docs/workflow.md、docs/ai-development.md、docs/deployment.md、.github/workflows/。</a:t>
+              <a:t>资料：仓库 README.md、docs/architecture.md；封面图为本次原创生成的概念视觉。</a:t>
             </a:r>
           </a:p>
         </p:txBody>
@@ -1691,63 +1610,6 @@
       </p:sp>
       <p:sp>
         <p:nvSpPr>
-          <p:cNvPr id="7" name="矩形 6">
-            <a:extLst>
-              <a:ext uri="{FF2B5EF4-FFF2-40B4-BE49-F238E27FC236}">
-                <a16:creationId xmlns:a16="http://schemas.microsoft.com/office/drawing/2014/main" id="{78865BF1-ACF0-4637-9E7E-25A98372522A}"/>
-              </a:ext>
-            </a:extLst>
-          </p:cNvPr>
-          <p:cNvSpPr>
-            <a:spLocks noGrp="1"/>
-          </p:cNvSpPr>
-          <p:nvPr/>
-        </p:nvSpPr>
-        <p:spPr>
-          <a:xfrm>
-            <a:off x="723900" y="6038850"/>
-            <a:ext cx="3619500" cy="190500"/>
-          </a:xfrm>
-          <a:prstGeom prst="rect">
-            <a:avLst/>
-          </a:prstGeom>
-          <a:noFill/>
-          <a:ln w="0">
-            <a:noFill/>
-          </a:ln>
-        </p:spPr>
-        <p:txBody>
-          <a:bodyPr>
-            <a:noAutofit/>
-          </a:bodyPr>
-          <a:lstStyle/>
-          <a:p>
-            <a:pPr>
-              <a:defRPr sz="900" b="1" i="0">
-                <a:solidFill>
-                  <a:srgbClr val="D6C9B2"/>
-                </a:solidFill>
-                <a:latin typeface="Consolas"/>
-                <a:ea typeface="Consolas"/>
-                <a:cs typeface="Consolas"/>
-              </a:defRPr>
-            </a:pPr>
-            <a:r>
-              <a:rPr sz="900" b="1" i="0">
-                <a:solidFill>
-                  <a:srgbClr val="D6C9B2"/>
-                </a:solidFill>
-                <a:latin typeface="Consolas"/>
-                <a:ea typeface="Consolas"/>
-                <a:cs typeface="Consolas"/>
-              </a:rPr>
-              <a:t>8 MINUTES / PRODUCT DEMO</a:t>
-            </a:r>
-          </a:p>
-        </p:txBody>
-      </p:sp>
-      <p:sp>
-        <p:nvSpPr>
           <p:cNvPr id="9" name="文本框 8">
             <a:extLst>
               <a:ext uri="{FF2B5EF4-FFF2-40B4-BE49-F238E27FC236}">
@@ -1761,7 +1623,7 @@
         <p:spPr>
           <a:xfrm>
             <a:off x="594928" y="3703036"/>
-            <a:ext cx="7701406" cy="523220"/>
+            <a:ext cx="7701406" cy="954107"/>
           </a:xfrm>
           <a:prstGeom prst="rect">
             <a:avLst/>
@@ -1782,212 +1644,64 @@
                 <a:latin typeface="Noto Serif SC" panose="02020200000000000000" pitchFamily="18" charset="-122"/>
                 <a:ea typeface="Noto Serif SC" panose="02020200000000000000" pitchFamily="18" charset="-122"/>
               </a:rPr>
-              <a:t>张嘉宇 袁林泽 封帆 黄珂凡 杨瑜 薛海若 梁宝烨</a:t>
-            </a:r>
-          </a:p>
-        </p:txBody>
-      </p:sp>
+              <a:t>张嘉宇 袁林泽 封帆 黄珂凡 </a:t>
+            </a:r>
+            <a:endParaRPr lang="en-US" altLang="zh-CN" sz="2800" b="1" dirty="0">
+              <a:solidFill>
+                <a:schemeClr val="bg1"/>
+              </a:solidFill>
+              <a:latin typeface="Noto Serif SC" panose="02020200000000000000" pitchFamily="18" charset="-122"/>
+              <a:ea typeface="Noto Serif SC" panose="02020200000000000000" pitchFamily="18" charset="-122"/>
+            </a:endParaRPr>
+          </a:p>
+          <a:p>
+            <a:r>
+              <a:rPr lang="zh-CN" altLang="en-US" sz="2800" b="1" dirty="0">
+                <a:solidFill>
+                  <a:schemeClr val="bg1"/>
+                </a:solidFill>
+                <a:latin typeface="Noto Serif SC" panose="02020200000000000000" pitchFamily="18" charset="-122"/>
+                <a:ea typeface="Noto Serif SC" panose="02020200000000000000" pitchFamily="18" charset="-122"/>
+              </a:rPr>
+              <a:t>杨瑜 薛海若 梁宝烨</a:t>
+            </a:r>
+          </a:p>
+        </p:txBody>
+      </p:sp>
+      <p:pic>
+        <p:nvPicPr>
+          <p:cNvPr id="10" name="图片 9">
+            <a:extLst>
+              <a:ext uri="{FF2B5EF4-FFF2-40B4-BE49-F238E27FC236}">
+                <a16:creationId xmlns:a16="http://schemas.microsoft.com/office/drawing/2014/main" id="{B2424B9B-5523-4B42-B257-D108B2BD9978}"/>
+              </a:ext>
+            </a:extLst>
+          </p:cNvPr>
+          <p:cNvPicPr>
+            <a:picLocks noChangeAspect="1"/>
+          </p:cNvPicPr>
+          <p:nvPr/>
+        </p:nvPicPr>
+        <p:blipFill>
+          <a:blip r:embed="rId4"/>
+          <a:stretch>
+            <a:fillRect/>
+          </a:stretch>
+        </p:blipFill>
+        <p:spPr>
+          <a:xfrm>
+            <a:off x="8065152" y="366061"/>
+            <a:ext cx="3668701" cy="6125877"/>
+          </a:xfrm>
+          <a:prstGeom prst="rect">
+            <a:avLst/>
+          </a:prstGeom>
+        </p:spPr>
+      </p:pic>
     </p:spTree>
     <p:extLst>
       <p:ext uri="{BB962C8B-B14F-4D97-AF65-F5344CB8AC3E}">
         <p14:creationId xmlns:p14="http://schemas.microsoft.com/office/powerpoint/2010/main" val="1564152084"/>
-      </p:ext>
-    </p:extLst>
-  </p:cSld>
-  <p:clrMapOvr>
-    <a:masterClrMapping/>
-  </p:clrMapOvr>
-</p:sld>
-</file>
-
-<file path=ppt/slides/slide10.xml><?xml version="1.0" encoding="utf-8"?>
-<p:sld xmlns:a="http://schemas.openxmlformats.org/drawingml/2006/main" xmlns:r="http://schemas.openxmlformats.org/officeDocument/2006/relationships" xmlns:p="http://schemas.openxmlformats.org/presentationml/2006/main">
-  <p:cSld>
-    <p:bg>
-      <p:bgPr>
-        <a:solidFill>
-          <a:srgbClr val="0B1C26"/>
-        </a:solidFill>
-        <a:effectLst/>
-      </p:bgPr>
-    </p:bg>
-    <p:spTree>
-      <p:nvGrpSpPr>
-        <p:cNvPr id="1" name=""/>
-        <p:cNvGrpSpPr/>
-        <p:nvPr/>
-      </p:nvGrpSpPr>
-      <p:grpSpPr>
-        <a:xfrm>
-          <a:off x="0" y="0"/>
-          <a:ext cx="0" cy="0"/>
-          <a:chOff x="0" y="0"/>
-          <a:chExt cx="0" cy="0"/>
-        </a:xfrm>
-      </p:grpSpPr>
-      <p:pic>
-        <p:nvPicPr>
-          <p:cNvPr id="6" name="图片 5"/>
-          <p:cNvPicPr>
-            <a:picLocks noChangeAspect="1"/>
-          </p:cNvPicPr>
-          <p:nvPr/>
-        </p:nvPicPr>
-        <p:blipFill>
-          <a:blip r:embed="rId3"/>
-          <a:srcRect t="27" b="27"/>
-          <a:stretch>
-            <a:fillRect/>
-          </a:stretch>
-        </p:blipFill>
-        <p:spPr>
-          <a:xfrm>
-            <a:off x="0" y="0"/>
-            <a:ext cx="12192000" cy="6858000"/>
-          </a:xfrm>
-          <a:prstGeom prst="rect">
-            <a:avLst/>
-          </a:prstGeom>
-        </p:spPr>
-      </p:pic>
-      <p:sp>
-        <p:nvSpPr>
-          <p:cNvPr id="2" name="矩形 1">
-            <a:extLst>
-              <a:ext uri="{FF2B5EF4-FFF2-40B4-BE49-F238E27FC236}">
-                <a16:creationId xmlns:a16="http://schemas.microsoft.com/office/drawing/2014/main" id="{23B56EB5-9504-403F-A920-2E0E2B7DEA2E}"/>
-              </a:ext>
-            </a:extLst>
-          </p:cNvPr>
-          <p:cNvSpPr>
-            <a:spLocks noGrp="1"/>
-          </p:cNvSpPr>
-          <p:nvPr/>
-        </p:nvSpPr>
-        <p:spPr>
-          <a:xfrm>
-            <a:off x="0" y="0"/>
-            <a:ext cx="12192000" cy="6858000"/>
-          </a:xfrm>
-          <a:prstGeom prst="rect">
-            <a:avLst/>
-          </a:prstGeom>
-          <a:solidFill>
-            <a:srgbClr val="0B1C26">
-              <a:alpha val="76000"/>
-            </a:srgbClr>
-          </a:solidFill>
-          <a:ln w="0">
-            <a:noFill/>
-          </a:ln>
-        </p:spPr>
-        <p:txBody>
-          <a:bodyPr/>
-          <a:lstStyle/>
-          <a:p>
-            <a:endParaRPr lang="zh-CN" altLang="en-US"/>
-          </a:p>
-        </p:txBody>
-      </p:sp>
-      <p:sp>
-        <p:nvSpPr>
-          <p:cNvPr id="3" name="矩形 2">
-            <a:extLst>
-              <a:ext uri="{FF2B5EF4-FFF2-40B4-BE49-F238E27FC236}">
-                <a16:creationId xmlns:a16="http://schemas.microsoft.com/office/drawing/2014/main" id="{7EBBBFC1-E67F-4D09-A61D-758B964DE9D6}"/>
-              </a:ext>
-            </a:extLst>
-          </p:cNvPr>
-          <p:cNvSpPr>
-            <a:spLocks noGrp="1"/>
-          </p:cNvSpPr>
-          <p:nvPr/>
-        </p:nvSpPr>
-        <p:spPr>
-          <a:xfrm>
-            <a:off x="4903980" y="2919200"/>
-            <a:ext cx="10363200" cy="895350"/>
-          </a:xfrm>
-          <a:prstGeom prst="rect">
-            <a:avLst/>
-          </a:prstGeom>
-          <a:noFill/>
-          <a:ln w="0">
-            <a:noFill/>
-          </a:ln>
-        </p:spPr>
-        <p:txBody>
-          <a:bodyPr>
-            <a:noAutofit/>
-          </a:bodyPr>
-          <a:lstStyle/>
-          <a:p>
-            <a:pPr>
-              <a:defRPr sz="4650" b="1" i="0">
-                <a:solidFill>
-                  <a:srgbClr val="FFF8EA"/>
-                </a:solidFill>
-                <a:latin typeface="Noto Serif SC"/>
-                <a:ea typeface="Noto Serif SC"/>
-                <a:cs typeface="Noto Serif SC"/>
-              </a:defRPr>
-            </a:pPr>
-            <a:r>
-              <a:rPr sz="8000" b="1" i="0" dirty="0" err="1">
-                <a:solidFill>
-                  <a:srgbClr val="FFF8EA"/>
-                </a:solidFill>
-                <a:latin typeface="Noto Serif SC"/>
-                <a:ea typeface="Noto Serif SC"/>
-                <a:cs typeface="Noto Serif SC"/>
-              </a:rPr>
-              <a:t>谢谢</a:t>
-            </a:r>
-            <a:endParaRPr sz="8000" b="1" i="0" dirty="0">
-              <a:solidFill>
-                <a:srgbClr val="FFF8EA"/>
-              </a:solidFill>
-              <a:latin typeface="Noto Serif SC"/>
-              <a:ea typeface="Noto Serif SC"/>
-              <a:cs typeface="Noto Serif SC"/>
-            </a:endParaRPr>
-          </a:p>
-        </p:txBody>
-      </p:sp>
-      <p:sp>
-        <p:nvSpPr>
-          <p:cNvPr id="4" name="矩形 3">
-            <a:extLst>
-              <a:ext uri="{FF2B5EF4-FFF2-40B4-BE49-F238E27FC236}">
-                <a16:creationId xmlns:a16="http://schemas.microsoft.com/office/drawing/2014/main" id="{6CD98CCA-A456-4D41-BD9C-89A778E32E8E}"/>
-              </a:ext>
-            </a:extLst>
-          </p:cNvPr>
-          <p:cNvSpPr>
-            <a:spLocks noGrp="1"/>
-          </p:cNvSpPr>
-          <p:nvPr/>
-        </p:nvSpPr>
-        <p:spPr>
-          <a:xfrm>
-            <a:off x="5353050" y="4314825"/>
-            <a:ext cx="1485900" cy="38100"/>
-          </a:xfrm>
-          <a:prstGeom prst="rect">
-            <a:avLst/>
-          </a:prstGeom>
-          <a:solidFill>
-            <a:srgbClr val="F28C28"/>
-          </a:solidFill>
-          <a:ln w="0">
-            <a:noFill/>
-          </a:ln>
-        </p:spPr>
-      </p:sp>
-    </p:spTree>
-    <p:extLst>
-      <p:ext uri="{BB962C8B-B14F-4D97-AF65-F5344CB8AC3E}">
-        <p14:creationId xmlns:p14="http://schemas.microsoft.com/office/powerpoint/2010/main" val="919422967"/>
       </p:ext>
     </p:extLst>
   </p:cSld>
@@ -7572,7 +7286,7 @@
               </a:defRPr>
             </a:pPr>
             <a:r>
-              <a:rPr sz="3525" b="1" i="0">
+              <a:rPr sz="3525" b="1" i="0" dirty="0" err="1">
                 <a:solidFill>
                   <a:srgbClr val="142431"/>
                 </a:solidFill>
@@ -7580,8 +7294,16 @@
                 <a:ea typeface="Noto Serif SC"/>
                 <a:cs typeface="Noto Serif SC"/>
               </a:rPr>
-              <a:t>前端技术选型</a:t>
-            </a:r>
+              <a:t>技术选型</a:t>
+            </a:r>
+            <a:endParaRPr sz="3525" b="1" i="0" dirty="0">
+              <a:solidFill>
+                <a:srgbClr val="142431"/>
+              </a:solidFill>
+              <a:latin typeface="Noto Serif SC"/>
+              <a:ea typeface="Noto Serif SC"/>
+              <a:cs typeface="Noto Serif SC"/>
+            </a:endParaRPr>
           </a:p>
         </p:txBody>
       </p:sp>
@@ -8479,6 +8201,36 @@
           </a:p>
         </p:txBody>
       </p:sp>
+      <p:pic>
+        <p:nvPicPr>
+          <p:cNvPr id="26" name="图片 25">
+            <a:extLst>
+              <a:ext uri="{FF2B5EF4-FFF2-40B4-BE49-F238E27FC236}">
+                <a16:creationId xmlns:a16="http://schemas.microsoft.com/office/drawing/2014/main" id="{F7B6276E-89F0-4018-A513-F286820BFD72}"/>
+              </a:ext>
+            </a:extLst>
+          </p:cNvPr>
+          <p:cNvPicPr>
+            <a:picLocks noChangeAspect="1"/>
+          </p:cNvPicPr>
+          <p:nvPr/>
+        </p:nvPicPr>
+        <p:blipFill>
+          <a:blip r:embed="rId3"/>
+          <a:stretch>
+            <a:fillRect/>
+          </a:stretch>
+        </p:blipFill>
+        <p:spPr>
+          <a:xfrm>
+            <a:off x="685800" y="2194396"/>
+            <a:ext cx="11329069" cy="3768254"/>
+          </a:xfrm>
+          <a:prstGeom prst="rect">
+            <a:avLst/>
+          </a:prstGeom>
+        </p:spPr>
+      </p:pic>
     </p:spTree>
     <p:extLst>
       <p:ext uri="{BB962C8B-B14F-4D97-AF65-F5344CB8AC3E}">
@@ -8493,6 +8245,101 @@
 </file>
 
 <file path=ppt/slides/slide8.xml><?xml version="1.0" encoding="utf-8"?>
+<p:sld xmlns:a="http://schemas.openxmlformats.org/drawingml/2006/main" xmlns:r="http://schemas.openxmlformats.org/officeDocument/2006/relationships" xmlns:p="http://schemas.openxmlformats.org/presentationml/2006/main">
+  <p:cSld>
+    <p:bg>
+      <p:bgPr>
+        <a:solidFill>
+          <a:srgbClr val="F7F0DF"/>
+        </a:solidFill>
+        <a:effectLst/>
+      </p:bgPr>
+    </p:bg>
+    <p:spTree>
+      <p:nvGrpSpPr>
+        <p:cNvPr id="1" name=""/>
+        <p:cNvGrpSpPr/>
+        <p:nvPr/>
+      </p:nvGrpSpPr>
+      <p:grpSpPr>
+        <a:xfrm>
+          <a:off x="0" y="0"/>
+          <a:ext cx="0" cy="0"/>
+          <a:chOff x="0" y="0"/>
+          <a:chExt cx="0" cy="0"/>
+        </a:xfrm>
+      </p:grpSpPr>
+      <p:sp>
+        <p:nvSpPr>
+          <p:cNvPr id="2" name="矩形 1">
+            <a:extLst>
+              <a:ext uri="{FF2B5EF4-FFF2-40B4-BE49-F238E27FC236}">
+                <a16:creationId xmlns:a16="http://schemas.microsoft.com/office/drawing/2014/main" id="{05D2B85D-09F5-4194-994C-D5732DF19D65}"/>
+              </a:ext>
+            </a:extLst>
+          </p:cNvPr>
+          <p:cNvSpPr>
+            <a:spLocks noGrp="1"/>
+          </p:cNvSpPr>
+          <p:nvPr/>
+        </p:nvSpPr>
+        <p:spPr>
+          <a:xfrm>
+            <a:off x="914400" y="2762250"/>
+            <a:ext cx="10363200" cy="1047750"/>
+          </a:xfrm>
+          <a:prstGeom prst="rect">
+            <a:avLst/>
+          </a:prstGeom>
+          <a:noFill/>
+          <a:ln w="0">
+            <a:noFill/>
+          </a:ln>
+        </p:spPr>
+        <p:txBody>
+          <a:bodyPr>
+            <a:noAutofit/>
+          </a:bodyPr>
+          <a:lstStyle/>
+          <a:p>
+            <a:pPr>
+              <a:defRPr sz="4800" b="1" i="0">
+                <a:solidFill>
+                  <a:srgbClr val="142431"/>
+                </a:solidFill>
+                <a:latin typeface="Noto Serif SC"/>
+                <a:ea typeface="Noto Serif SC"/>
+                <a:cs typeface="Noto Serif SC"/>
+              </a:defRPr>
+            </a:pPr>
+            <a:r>
+              <a:rPr sz="4800" b="1" i="0">
+                <a:solidFill>
+                  <a:srgbClr val="142431"/>
+                </a:solidFill>
+                <a:latin typeface="Noto Serif SC"/>
+                <a:ea typeface="Noto Serif SC"/>
+                <a:cs typeface="Noto Serif SC"/>
+              </a:rPr>
+              <a:t>团队/项目协作</a:t>
+            </a:r>
+          </a:p>
+        </p:txBody>
+      </p:sp>
+    </p:spTree>
+    <p:extLst>
+      <p:ext uri="{BB962C8B-B14F-4D97-AF65-F5344CB8AC3E}">
+        <p14:creationId xmlns:p14="http://schemas.microsoft.com/office/powerpoint/2010/main" val="1329907950"/>
+      </p:ext>
+    </p:extLst>
+  </p:cSld>
+  <p:clrMapOvr>
+    <a:masterClrMapping/>
+  </p:clrMapOvr>
+</p:sld>
+</file>
+
+<file path=ppt/slides/slide9.xml><?xml version="1.0" encoding="utf-8"?>
 <p:sld xmlns:a="http://schemas.openxmlformats.org/drawingml/2006/main" xmlns:r="http://schemas.openxmlformats.org/officeDocument/2006/relationships" xmlns:p="http://schemas.openxmlformats.org/presentationml/2006/main">
   <p:cSld>
     <p:bg>
@@ -8517,24 +8364,88 @@
           <a:chExt cx="0" cy="0"/>
         </a:xfrm>
       </p:grpSpPr>
-      <p:sp>
-        <p:nvSpPr>
-          <p:cNvPr id="28" name="矩形 27">
-            <a:extLst>
-              <a:ext uri="{FF2B5EF4-FFF2-40B4-BE49-F238E27FC236}">
-                <a16:creationId xmlns:a16="http://schemas.microsoft.com/office/drawing/2014/main" id="{198B6902-212C-49A2-A9F4-02468D451383}"/>
-              </a:ext>
-            </a:extLst>
-          </p:cNvPr>
-          <p:cNvSpPr>
-            <a:spLocks noGrp="1"/>
-          </p:cNvSpPr>
-          <p:nvPr/>
-        </p:nvSpPr>
-        <p:spPr>
-          <a:xfrm>
-            <a:off x="10610850" y="400050"/>
-            <a:ext cx="1028700" cy="209550"/>
+      <p:pic>
+        <p:nvPicPr>
+          <p:cNvPr id="6" name="图片 5"/>
+          <p:cNvPicPr>
+            <a:picLocks noChangeAspect="1"/>
+          </p:cNvPicPr>
+          <p:nvPr/>
+        </p:nvPicPr>
+        <p:blipFill>
+          <a:blip r:embed="rId3"/>
+          <a:srcRect t="27" b="27"/>
+          <a:stretch>
+            <a:fillRect/>
+          </a:stretch>
+        </p:blipFill>
+        <p:spPr>
+          <a:xfrm>
+            <a:off x="0" y="0"/>
+            <a:ext cx="12192000" cy="6858000"/>
+          </a:xfrm>
+          <a:prstGeom prst="rect">
+            <a:avLst/>
+          </a:prstGeom>
+        </p:spPr>
+      </p:pic>
+      <p:sp>
+        <p:nvSpPr>
+          <p:cNvPr id="2" name="矩形 1">
+            <a:extLst>
+              <a:ext uri="{FF2B5EF4-FFF2-40B4-BE49-F238E27FC236}">
+                <a16:creationId xmlns:a16="http://schemas.microsoft.com/office/drawing/2014/main" id="{23B56EB5-9504-403F-A920-2E0E2B7DEA2E}"/>
+              </a:ext>
+            </a:extLst>
+          </p:cNvPr>
+          <p:cNvSpPr>
+            <a:spLocks noGrp="1"/>
+          </p:cNvSpPr>
+          <p:nvPr/>
+        </p:nvSpPr>
+        <p:spPr>
+          <a:xfrm>
+            <a:off x="0" y="0"/>
+            <a:ext cx="12192000" cy="6858000"/>
+          </a:xfrm>
+          <a:prstGeom prst="rect">
+            <a:avLst/>
+          </a:prstGeom>
+          <a:solidFill>
+            <a:srgbClr val="0B1C26">
+              <a:alpha val="76000"/>
+            </a:srgbClr>
+          </a:solidFill>
+          <a:ln w="0">
+            <a:noFill/>
+          </a:ln>
+        </p:spPr>
+        <p:txBody>
+          <a:bodyPr/>
+          <a:lstStyle/>
+          <a:p>
+            <a:endParaRPr lang="zh-CN" altLang="en-US"/>
+          </a:p>
+        </p:txBody>
+      </p:sp>
+      <p:sp>
+        <p:nvSpPr>
+          <p:cNvPr id="3" name="矩形 2">
+            <a:extLst>
+              <a:ext uri="{FF2B5EF4-FFF2-40B4-BE49-F238E27FC236}">
+                <a16:creationId xmlns:a16="http://schemas.microsoft.com/office/drawing/2014/main" id="{7EBBBFC1-E67F-4D09-A61D-758B964DE9D6}"/>
+              </a:ext>
+            </a:extLst>
+          </p:cNvPr>
+          <p:cNvSpPr>
+            <a:spLocks noGrp="1"/>
+          </p:cNvSpPr>
+          <p:nvPr/>
+        </p:nvSpPr>
+        <p:spPr>
+          <a:xfrm>
+            <a:off x="4903980" y="2919200"/>
+            <a:ext cx="10363200" cy="895350"/>
           </a:xfrm>
           <a:prstGeom prst="rect">
             <a:avLst/>
@@ -8551,64 +8462,7 @@
           <a:lstStyle/>
           <a:p>
             <a:pPr>
-              <a:defRPr sz="900" b="1" i="0">
-                <a:solidFill>
-                  <a:srgbClr val="D2C7B5"/>
-                </a:solidFill>
-                <a:latin typeface="Consolas"/>
-                <a:ea typeface="Consolas"/>
-                <a:cs typeface="Consolas"/>
-              </a:defRPr>
-            </a:pPr>
-            <a:r>
-              <a:rPr sz="900" b="1" i="0">
-                <a:solidFill>
-                  <a:srgbClr val="D2C7B5"/>
-                </a:solidFill>
-                <a:latin typeface="Consolas"/>
-                <a:ea typeface="Consolas"/>
-                <a:cs typeface="Consolas"/>
-              </a:rPr>
-              <a:t>08 / 10</a:t>
-            </a:r>
-          </a:p>
-        </p:txBody>
-      </p:sp>
-      <p:sp>
-        <p:nvSpPr>
-          <p:cNvPr id="2" name="矩形 1">
-            <a:extLst>
-              <a:ext uri="{FF2B5EF4-FFF2-40B4-BE49-F238E27FC236}">
-                <a16:creationId xmlns:a16="http://schemas.microsoft.com/office/drawing/2014/main" id="{3A256E6D-CC10-4B9E-90F5-0A304C48442A}"/>
-              </a:ext>
-            </a:extLst>
-          </p:cNvPr>
-          <p:cNvSpPr>
-            <a:spLocks noGrp="1"/>
-          </p:cNvSpPr>
-          <p:nvPr/>
-        </p:nvSpPr>
-        <p:spPr>
-          <a:xfrm>
-            <a:off x="685800" y="876300"/>
-            <a:ext cx="6858000" cy="619125"/>
-          </a:xfrm>
-          <a:prstGeom prst="rect">
-            <a:avLst/>
-          </a:prstGeom>
-          <a:noFill/>
-          <a:ln w="0">
-            <a:noFill/>
-          </a:ln>
-        </p:spPr>
-        <p:txBody>
-          <a:bodyPr>
-            <a:noAutofit/>
-          </a:bodyPr>
-          <a:lstStyle/>
-          <a:p>
-            <a:pPr>
-              <a:defRPr sz="3525" b="1" i="0">
+              <a:defRPr sz="4650" b="1" i="0">
                 <a:solidFill>
                   <a:srgbClr val="FFF8EA"/>
                 </a:solidFill>
@@ -8618,7 +8472,7 @@
               </a:defRPr>
             </a:pPr>
             <a:r>
-              <a:rPr sz="3525" b="1" i="0">
+              <a:rPr sz="8000" b="1" i="0" dirty="0" err="1">
                 <a:solidFill>
                   <a:srgbClr val="FFF8EA"/>
                 </a:solidFill>
@@ -8626,1349 +8480,53 @@
                 <a:ea typeface="Noto Serif SC"/>
                 <a:cs typeface="Noto Serif SC"/>
               </a:rPr>
-              <a:t>后端技术选型</a:t>
-            </a:r>
-          </a:p>
-        </p:txBody>
-      </p:sp>
-      <p:sp>
-        <p:nvSpPr>
-          <p:cNvPr id="3" name="椭圆 2">
-            <a:extLst>
-              <a:ext uri="{FF2B5EF4-FFF2-40B4-BE49-F238E27FC236}">
-                <a16:creationId xmlns:a16="http://schemas.microsoft.com/office/drawing/2014/main" id="{B62E60BE-7150-4113-8B04-8B06A336B20E}"/>
-              </a:ext>
-            </a:extLst>
-          </p:cNvPr>
-          <p:cNvSpPr>
-            <a:spLocks noGrp="1"/>
-          </p:cNvSpPr>
-          <p:nvPr/>
-        </p:nvSpPr>
-        <p:spPr>
-          <a:xfrm>
-            <a:off x="1611925" y="2686050"/>
-            <a:ext cx="400050" cy="400050"/>
-          </a:xfrm>
-          <a:prstGeom prst="ellipse">
+              <a:t>谢谢</a:t>
+            </a:r>
+            <a:endParaRPr sz="8000" b="1" i="0" dirty="0">
+              <a:solidFill>
+                <a:srgbClr val="FFF8EA"/>
+              </a:solidFill>
+              <a:latin typeface="Noto Serif SC"/>
+              <a:ea typeface="Noto Serif SC"/>
+              <a:cs typeface="Noto Serif SC"/>
+            </a:endParaRPr>
+          </a:p>
+        </p:txBody>
+      </p:sp>
+      <p:sp>
+        <p:nvSpPr>
+          <p:cNvPr id="4" name="矩形 3">
+            <a:extLst>
+              <a:ext uri="{FF2B5EF4-FFF2-40B4-BE49-F238E27FC236}">
+                <a16:creationId xmlns:a16="http://schemas.microsoft.com/office/drawing/2014/main" id="{6CD98CCA-A456-4D41-BD9C-89A778E32E8E}"/>
+              </a:ext>
+            </a:extLst>
+          </p:cNvPr>
+          <p:cNvSpPr>
+            <a:spLocks noGrp="1"/>
+          </p:cNvSpPr>
+          <p:nvPr/>
+        </p:nvSpPr>
+        <p:spPr>
+          <a:xfrm>
+            <a:off x="5353050" y="4314825"/>
+            <a:ext cx="1485900" cy="38100"/>
+          </a:xfrm>
+          <a:prstGeom prst="rect">
             <a:avLst/>
           </a:prstGeom>
           <a:solidFill>
             <a:srgbClr val="F28C28"/>
           </a:solidFill>
-          <a:ln w="9525">
-            <a:solidFill>
-              <a:srgbClr val="F28C28"/>
-            </a:solidFill>
-            <a:prstDash val="solid"/>
-          </a:ln>
-        </p:spPr>
-      </p:sp>
-      <p:sp>
-        <p:nvSpPr>
-          <p:cNvPr id="4" name="矩形 3">
-            <a:extLst>
-              <a:ext uri="{FF2B5EF4-FFF2-40B4-BE49-F238E27FC236}">
-                <a16:creationId xmlns:a16="http://schemas.microsoft.com/office/drawing/2014/main" id="{3E3F592F-4E93-4941-87FE-C55010DD2098}"/>
-              </a:ext>
-            </a:extLst>
-          </p:cNvPr>
-          <p:cNvSpPr>
-            <a:spLocks noGrp="1"/>
-          </p:cNvSpPr>
-          <p:nvPr/>
-        </p:nvSpPr>
-        <p:spPr>
-          <a:xfrm>
-            <a:off x="1535725" y="3190875"/>
-            <a:ext cx="571500" cy="171450"/>
-          </a:xfrm>
-          <a:prstGeom prst="rect">
-            <a:avLst/>
-          </a:prstGeom>
-          <a:noFill/>
-          <a:ln w="0">
-            <a:noFill/>
-          </a:ln>
-        </p:spPr>
-        <p:txBody>
-          <a:bodyPr>
-            <a:noAutofit/>
-          </a:bodyPr>
-          <a:lstStyle/>
-          <a:p>
-            <a:pPr>
-              <a:defRPr sz="825" b="1" i="0">
-                <a:solidFill>
-                  <a:srgbClr val="F5B56A"/>
-                </a:solidFill>
-                <a:latin typeface="Consolas"/>
-                <a:ea typeface="Consolas"/>
-                <a:cs typeface="Consolas"/>
-              </a:defRPr>
-            </a:pPr>
-            <a:r>
-              <a:rPr sz="825" b="1" i="0">
-                <a:solidFill>
-                  <a:srgbClr val="F5B56A"/>
-                </a:solidFill>
-                <a:latin typeface="Consolas"/>
-                <a:ea typeface="Consolas"/>
-                <a:cs typeface="Consolas"/>
-              </a:rPr>
-              <a:t>现在</a:t>
-            </a:r>
-          </a:p>
-        </p:txBody>
-      </p:sp>
-      <p:sp>
-        <p:nvSpPr>
-          <p:cNvPr id="5" name="矩形 4">
-            <a:extLst>
-              <a:ext uri="{FF2B5EF4-FFF2-40B4-BE49-F238E27FC236}">
-                <a16:creationId xmlns:a16="http://schemas.microsoft.com/office/drawing/2014/main" id="{CD9D8890-1183-4C3F-854E-2E547999F99E}"/>
-              </a:ext>
-            </a:extLst>
-          </p:cNvPr>
-          <p:cNvSpPr>
-            <a:spLocks noGrp="1"/>
-          </p:cNvSpPr>
-          <p:nvPr/>
-        </p:nvSpPr>
-        <p:spPr>
-          <a:xfrm>
-            <a:off x="1326175" y="3581400"/>
-            <a:ext cx="971550" cy="552450"/>
-          </a:xfrm>
-          <a:prstGeom prst="rect">
-            <a:avLst/>
-          </a:prstGeom>
-          <a:noFill/>
-          <a:ln w="0">
-            <a:noFill/>
-          </a:ln>
-        </p:spPr>
-        <p:txBody>
-          <a:bodyPr>
-            <a:noAutofit/>
-          </a:bodyPr>
-          <a:lstStyle/>
-          <a:p>
-            <a:pPr>
-              <a:defRPr sz="1500" b="1" i="0">
-                <a:solidFill>
-                  <a:srgbClr val="FFF8EA"/>
-                </a:solidFill>
-                <a:latin typeface="Noto Sans SC"/>
-                <a:ea typeface="Noto Sans SC"/>
-                <a:cs typeface="Noto Sans SC"/>
-              </a:defRPr>
-            </a:pPr>
-            <a:r>
-              <a:rPr sz="1500" b="1" i="0">
-                <a:solidFill>
-                  <a:srgbClr val="FFF8EA"/>
-                </a:solidFill>
-                <a:latin typeface="Noto Sans SC"/>
-                <a:ea typeface="Noto Sans SC"/>
-                <a:cs typeface="Noto Sans SC"/>
-              </a:rPr>
-              <a:t>FastAPI</a:t>
-            </a:r>
-          </a:p>
-        </p:txBody>
-      </p:sp>
-      <p:sp>
-        <p:nvSpPr>
-          <p:cNvPr id="6" name="矩形 5">
-            <a:extLst>
-              <a:ext uri="{FF2B5EF4-FFF2-40B4-BE49-F238E27FC236}">
-                <a16:creationId xmlns:a16="http://schemas.microsoft.com/office/drawing/2014/main" id="{3B5FAF17-2DA6-4736-8902-B1A0B7D65589}"/>
-              </a:ext>
-            </a:extLst>
-          </p:cNvPr>
-          <p:cNvSpPr>
-            <a:spLocks noGrp="1"/>
-          </p:cNvSpPr>
-          <p:nvPr/>
-        </p:nvSpPr>
-        <p:spPr>
-          <a:xfrm>
-            <a:off x="1248792" y="4086225"/>
-            <a:ext cx="1466850" cy="533400"/>
-          </a:xfrm>
-          <a:prstGeom prst="rect">
-            <a:avLst/>
-          </a:prstGeom>
-          <a:noFill/>
-          <a:ln w="0">
-            <a:noFill/>
-          </a:ln>
-        </p:spPr>
-        <p:txBody>
-          <a:bodyPr>
-            <a:noAutofit/>
-          </a:bodyPr>
-          <a:lstStyle/>
-          <a:p>
-            <a:pPr>
-              <a:defRPr sz="1125" b="0" i="0">
-                <a:solidFill>
-                  <a:srgbClr val="D6C9B2"/>
-                </a:solidFill>
-                <a:latin typeface="Noto Sans SC"/>
-                <a:ea typeface="Noto Sans SC"/>
-                <a:cs typeface="Noto Sans SC"/>
-              </a:defRPr>
-            </a:pPr>
-            <a:r>
-              <a:rPr sz="1125" b="0" i="0" dirty="0" err="1">
-                <a:solidFill>
-                  <a:srgbClr val="D6C9B2"/>
-                </a:solidFill>
-                <a:latin typeface="Noto Sans SC"/>
-                <a:ea typeface="Noto Sans SC"/>
-                <a:cs typeface="Noto Sans SC"/>
-              </a:rPr>
-              <a:t>提供</a:t>
-            </a:r>
-            <a:r>
-              <a:rPr sz="1125" b="0" i="0" dirty="0">
-                <a:solidFill>
-                  <a:srgbClr val="D6C9B2"/>
-                </a:solidFill>
-                <a:latin typeface="Noto Sans SC"/>
-                <a:ea typeface="Noto Sans SC"/>
-                <a:cs typeface="Noto Sans SC"/>
-              </a:rPr>
-              <a:t> HTTP </a:t>
-            </a:r>
-            <a:r>
-              <a:rPr sz="1125" b="0" i="0" dirty="0" err="1">
-                <a:solidFill>
-                  <a:srgbClr val="D6C9B2"/>
-                </a:solidFill>
-                <a:latin typeface="Noto Sans SC"/>
-                <a:ea typeface="Noto Sans SC"/>
-                <a:cs typeface="Noto Sans SC"/>
-              </a:rPr>
-              <a:t>接口</a:t>
-            </a:r>
-            <a:endParaRPr sz="1125" b="0" i="0" dirty="0">
-              <a:solidFill>
-                <a:srgbClr val="D6C9B2"/>
-              </a:solidFill>
-              <a:latin typeface="Noto Sans SC"/>
-              <a:ea typeface="Noto Sans SC"/>
-              <a:cs typeface="Noto Sans SC"/>
-            </a:endParaRPr>
-          </a:p>
-          <a:p>
-            <a:pPr>
-              <a:defRPr sz="1125" b="0" i="0">
-                <a:solidFill>
-                  <a:srgbClr val="D6C9B2"/>
-                </a:solidFill>
-                <a:latin typeface="Noto Sans SC"/>
-                <a:ea typeface="Noto Sans SC"/>
-                <a:cs typeface="Noto Sans SC"/>
-              </a:defRPr>
-            </a:pPr>
-            <a:r>
-              <a:rPr sz="1125" b="0" i="0" dirty="0" err="1">
-                <a:solidFill>
-                  <a:srgbClr val="D6C9B2"/>
-                </a:solidFill>
-                <a:latin typeface="Noto Sans SC"/>
-                <a:ea typeface="Noto Sans SC"/>
-                <a:cs typeface="Noto Sans SC"/>
-              </a:rPr>
-              <a:t>当前：GET</a:t>
-            </a:r>
-            <a:r>
-              <a:rPr sz="1125" b="0" i="0" dirty="0">
-                <a:solidFill>
-                  <a:srgbClr val="D6C9B2"/>
-                </a:solidFill>
-                <a:latin typeface="Noto Sans SC"/>
-                <a:ea typeface="Noto Sans SC"/>
-                <a:cs typeface="Noto Sans SC"/>
-              </a:rPr>
-              <a:t> /test/hello</a:t>
-            </a:r>
-          </a:p>
-        </p:txBody>
-      </p:sp>
-      <p:sp>
-        <p:nvSpPr>
-          <p:cNvPr id="7" name="矩形 6">
-            <a:extLst>
-              <a:ext uri="{FF2B5EF4-FFF2-40B4-BE49-F238E27FC236}">
-                <a16:creationId xmlns:a16="http://schemas.microsoft.com/office/drawing/2014/main" id="{031FEF4C-91BB-4255-B140-E49B87AB9912}"/>
-              </a:ext>
-            </a:extLst>
-          </p:cNvPr>
-          <p:cNvSpPr>
-            <a:spLocks noGrp="1"/>
-          </p:cNvSpPr>
-          <p:nvPr/>
-        </p:nvSpPr>
-        <p:spPr>
-          <a:xfrm>
-            <a:off x="2031025" y="2876550"/>
-            <a:ext cx="1619250" cy="19050"/>
-          </a:xfrm>
-          <a:prstGeom prst="rect">
-            <a:avLst/>
-          </a:prstGeom>
-          <a:solidFill>
-            <a:srgbClr val="52616A"/>
-          </a:solidFill>
-          <a:ln w="0">
-            <a:noFill/>
-          </a:ln>
-        </p:spPr>
-      </p:sp>
-      <p:sp>
-        <p:nvSpPr>
-          <p:cNvPr id="8" name="椭圆 7">
-            <a:extLst>
-              <a:ext uri="{FF2B5EF4-FFF2-40B4-BE49-F238E27FC236}">
-                <a16:creationId xmlns:a16="http://schemas.microsoft.com/office/drawing/2014/main" id="{62833210-25E3-4F08-B4AD-3D9011496954}"/>
-              </a:ext>
-            </a:extLst>
-          </p:cNvPr>
-          <p:cNvSpPr>
-            <a:spLocks noGrp="1"/>
-          </p:cNvSpPr>
-          <p:nvPr/>
-        </p:nvSpPr>
-        <p:spPr>
-          <a:xfrm>
-            <a:off x="3755050" y="2686050"/>
-            <a:ext cx="400050" cy="400050"/>
-          </a:xfrm>
-          <a:prstGeom prst="ellipse">
-            <a:avLst/>
-          </a:prstGeom>
-          <a:solidFill>
-            <a:srgbClr val="F28C28"/>
-          </a:solidFill>
-          <a:ln w="9525">
-            <a:solidFill>
-              <a:srgbClr val="F28C28"/>
-            </a:solidFill>
-            <a:prstDash val="solid"/>
-          </a:ln>
-        </p:spPr>
-      </p:sp>
-      <p:sp>
-        <p:nvSpPr>
-          <p:cNvPr id="9" name="矩形 8">
-            <a:extLst>
-              <a:ext uri="{FF2B5EF4-FFF2-40B4-BE49-F238E27FC236}">
-                <a16:creationId xmlns:a16="http://schemas.microsoft.com/office/drawing/2014/main" id="{7182054C-97D1-4838-BA97-47BEE5CFCEAD}"/>
-              </a:ext>
-            </a:extLst>
-          </p:cNvPr>
-          <p:cNvSpPr>
-            <a:spLocks noGrp="1"/>
-          </p:cNvSpPr>
-          <p:nvPr/>
-        </p:nvSpPr>
-        <p:spPr>
-          <a:xfrm>
-            <a:off x="3678850" y="3190875"/>
-            <a:ext cx="571500" cy="171450"/>
-          </a:xfrm>
-          <a:prstGeom prst="rect">
-            <a:avLst/>
-          </a:prstGeom>
-          <a:noFill/>
-          <a:ln w="0">
-            <a:noFill/>
-          </a:ln>
-        </p:spPr>
-        <p:txBody>
-          <a:bodyPr>
-            <a:noAutofit/>
-          </a:bodyPr>
-          <a:lstStyle/>
-          <a:p>
-            <a:pPr>
-              <a:defRPr sz="825" b="1" i="0">
-                <a:solidFill>
-                  <a:srgbClr val="F5B56A"/>
-                </a:solidFill>
-                <a:latin typeface="Consolas"/>
-                <a:ea typeface="Consolas"/>
-                <a:cs typeface="Consolas"/>
-              </a:defRPr>
-            </a:pPr>
-            <a:r>
-              <a:rPr sz="825" b="1" i="0">
-                <a:solidFill>
-                  <a:srgbClr val="F5B56A"/>
-                </a:solidFill>
-                <a:latin typeface="Consolas"/>
-                <a:ea typeface="Consolas"/>
-                <a:cs typeface="Consolas"/>
-              </a:rPr>
-              <a:t>现在</a:t>
-            </a:r>
-          </a:p>
-        </p:txBody>
-      </p:sp>
-      <p:sp>
-        <p:nvSpPr>
-          <p:cNvPr id="10" name="矩形 9">
-            <a:extLst>
-              <a:ext uri="{FF2B5EF4-FFF2-40B4-BE49-F238E27FC236}">
-                <a16:creationId xmlns:a16="http://schemas.microsoft.com/office/drawing/2014/main" id="{1D2CF324-BDD3-4909-8551-3730FC34AC0E}"/>
-              </a:ext>
-            </a:extLst>
-          </p:cNvPr>
-          <p:cNvSpPr>
-            <a:spLocks noGrp="1"/>
-          </p:cNvSpPr>
-          <p:nvPr/>
-        </p:nvSpPr>
-        <p:spPr>
-          <a:xfrm>
-            <a:off x="3469299" y="3581400"/>
-            <a:ext cx="1131109" cy="552450"/>
-          </a:xfrm>
-          <a:prstGeom prst="rect">
-            <a:avLst/>
-          </a:prstGeom>
-          <a:noFill/>
-          <a:ln w="0">
-            <a:noFill/>
-          </a:ln>
-        </p:spPr>
-        <p:txBody>
-          <a:bodyPr>
-            <a:noAutofit/>
-          </a:bodyPr>
-          <a:lstStyle/>
-          <a:p>
-            <a:pPr>
-              <a:defRPr sz="1500" b="1" i="0">
-                <a:solidFill>
-                  <a:srgbClr val="FFF8EA"/>
-                </a:solidFill>
-                <a:latin typeface="Noto Sans SC"/>
-                <a:ea typeface="Noto Sans SC"/>
-                <a:cs typeface="Noto Sans SC"/>
-              </a:defRPr>
-            </a:pPr>
-            <a:r>
-              <a:rPr sz="1500" b="1" i="0" dirty="0" err="1">
-                <a:solidFill>
-                  <a:srgbClr val="FFF8EA"/>
-                </a:solidFill>
-                <a:latin typeface="Noto Sans SC"/>
-                <a:ea typeface="Noto Sans SC"/>
-                <a:cs typeface="Noto Sans SC"/>
-              </a:rPr>
-              <a:t>Pydantic</a:t>
-            </a:r>
-            <a:endParaRPr sz="1500" b="1" i="0" dirty="0">
-              <a:solidFill>
-                <a:srgbClr val="FFF8EA"/>
-              </a:solidFill>
-              <a:latin typeface="Noto Sans SC"/>
-              <a:ea typeface="Noto Sans SC"/>
-              <a:cs typeface="Noto Sans SC"/>
-            </a:endParaRPr>
-          </a:p>
-        </p:txBody>
-      </p:sp>
-      <p:sp>
-        <p:nvSpPr>
-          <p:cNvPr id="11" name="矩形 10">
-            <a:extLst>
-              <a:ext uri="{FF2B5EF4-FFF2-40B4-BE49-F238E27FC236}">
-                <a16:creationId xmlns:a16="http://schemas.microsoft.com/office/drawing/2014/main" id="{82DC191D-6DF9-4644-8451-A6EB2A0AAD63}"/>
-              </a:ext>
-            </a:extLst>
-          </p:cNvPr>
-          <p:cNvSpPr>
-            <a:spLocks noGrp="1"/>
-          </p:cNvSpPr>
-          <p:nvPr/>
-        </p:nvSpPr>
-        <p:spPr>
-          <a:xfrm>
-            <a:off x="3221650" y="4248150"/>
-            <a:ext cx="1466850" cy="533400"/>
-          </a:xfrm>
-          <a:prstGeom prst="rect">
-            <a:avLst/>
-          </a:prstGeom>
-          <a:noFill/>
-          <a:ln w="0">
-            <a:noFill/>
-          </a:ln>
-        </p:spPr>
-        <p:txBody>
-          <a:bodyPr>
-            <a:noAutofit/>
-          </a:bodyPr>
-          <a:lstStyle/>
-          <a:p>
-            <a:pPr>
-              <a:defRPr sz="1125" b="0" i="0">
-                <a:solidFill>
-                  <a:srgbClr val="D6C9B2"/>
-                </a:solidFill>
-                <a:latin typeface="Noto Sans SC"/>
-                <a:ea typeface="Noto Sans SC"/>
-                <a:cs typeface="Noto Sans SC"/>
-              </a:defRPr>
-            </a:pPr>
-            <a:r>
-              <a:rPr sz="1125" b="0" i="0">
-                <a:solidFill>
-                  <a:srgbClr val="D6C9B2"/>
-                </a:solidFill>
-                <a:latin typeface="Noto Sans SC"/>
-                <a:ea typeface="Noto Sans SC"/>
-                <a:cs typeface="Noto Sans SC"/>
-              </a:rPr>
-              <a:t>校验请求与响应的数据格式</a:t>
-            </a:r>
-          </a:p>
-        </p:txBody>
-      </p:sp>
-      <p:sp>
-        <p:nvSpPr>
-          <p:cNvPr id="12" name="矩形 11">
-            <a:extLst>
-              <a:ext uri="{FF2B5EF4-FFF2-40B4-BE49-F238E27FC236}">
-                <a16:creationId xmlns:a16="http://schemas.microsoft.com/office/drawing/2014/main" id="{E6EC9DFC-0DBC-40A0-97BA-A54CC20E1932}"/>
-              </a:ext>
-            </a:extLst>
-          </p:cNvPr>
-          <p:cNvSpPr>
-            <a:spLocks noGrp="1"/>
-          </p:cNvSpPr>
-          <p:nvPr/>
-        </p:nvSpPr>
-        <p:spPr>
-          <a:xfrm>
-            <a:off x="4174150" y="2876550"/>
-            <a:ext cx="1619250" cy="19050"/>
-          </a:xfrm>
-          <a:prstGeom prst="rect">
-            <a:avLst/>
-          </a:prstGeom>
-          <a:solidFill>
-            <a:srgbClr val="52616A"/>
-          </a:solidFill>
-          <a:ln w="0">
-            <a:noFill/>
-          </a:ln>
-        </p:spPr>
-      </p:sp>
-      <p:sp>
-        <p:nvSpPr>
-          <p:cNvPr id="13" name="椭圆 12">
-            <a:extLst>
-              <a:ext uri="{FF2B5EF4-FFF2-40B4-BE49-F238E27FC236}">
-                <a16:creationId xmlns:a16="http://schemas.microsoft.com/office/drawing/2014/main" id="{0C53A0A3-E703-4AF6-92BD-319F8466C194}"/>
-              </a:ext>
-            </a:extLst>
-          </p:cNvPr>
-          <p:cNvSpPr>
-            <a:spLocks noGrp="1"/>
-          </p:cNvSpPr>
-          <p:nvPr/>
-        </p:nvSpPr>
-        <p:spPr>
-          <a:xfrm>
-            <a:off x="5898175" y="2686050"/>
-            <a:ext cx="400050" cy="400050"/>
-          </a:xfrm>
-          <a:prstGeom prst="ellipse">
-            <a:avLst/>
-          </a:prstGeom>
-          <a:solidFill>
-            <a:srgbClr val="112D3A"/>
-          </a:solidFill>
-          <a:ln w="9525">
-            <a:solidFill>
-              <a:srgbClr val="F5B56A"/>
-            </a:solidFill>
-            <a:prstDash val="solid"/>
-          </a:ln>
-        </p:spPr>
-      </p:sp>
-      <p:sp>
-        <p:nvSpPr>
-          <p:cNvPr id="14" name="矩形 13">
-            <a:extLst>
-              <a:ext uri="{FF2B5EF4-FFF2-40B4-BE49-F238E27FC236}">
-                <a16:creationId xmlns:a16="http://schemas.microsoft.com/office/drawing/2014/main" id="{602D3893-DAD9-401F-932D-E0F0F2978911}"/>
-              </a:ext>
-            </a:extLst>
-          </p:cNvPr>
-          <p:cNvSpPr>
-            <a:spLocks noGrp="1"/>
-          </p:cNvSpPr>
-          <p:nvPr/>
-        </p:nvSpPr>
-        <p:spPr>
-          <a:xfrm>
-            <a:off x="5821975" y="3190875"/>
-            <a:ext cx="571500" cy="171450"/>
-          </a:xfrm>
-          <a:prstGeom prst="rect">
-            <a:avLst/>
-          </a:prstGeom>
-          <a:noFill/>
-          <a:ln w="0">
-            <a:noFill/>
-          </a:ln>
-        </p:spPr>
-        <p:txBody>
-          <a:bodyPr>
-            <a:noAutofit/>
-          </a:bodyPr>
-          <a:lstStyle/>
-          <a:p>
-            <a:pPr>
-              <a:defRPr sz="825" b="1" i="0">
-                <a:solidFill>
-                  <a:srgbClr val="9DA9AE"/>
-                </a:solidFill>
-                <a:latin typeface="Consolas"/>
-                <a:ea typeface="Consolas"/>
-                <a:cs typeface="Consolas"/>
-              </a:defRPr>
-            </a:pPr>
-            <a:r>
-              <a:rPr sz="825" b="1" i="0">
-                <a:solidFill>
-                  <a:srgbClr val="9DA9AE"/>
-                </a:solidFill>
-                <a:latin typeface="Consolas"/>
-                <a:ea typeface="Consolas"/>
-                <a:cs typeface="Consolas"/>
-              </a:rPr>
-              <a:t>后续</a:t>
-            </a:r>
-          </a:p>
-        </p:txBody>
-      </p:sp>
-      <p:sp>
-        <p:nvSpPr>
-          <p:cNvPr id="15" name="矩形 14">
-            <a:extLst>
-              <a:ext uri="{FF2B5EF4-FFF2-40B4-BE49-F238E27FC236}">
-                <a16:creationId xmlns:a16="http://schemas.microsoft.com/office/drawing/2014/main" id="{C4AE7E12-72BB-4135-A633-7B83BCCD0608}"/>
-              </a:ext>
-            </a:extLst>
-          </p:cNvPr>
-          <p:cNvSpPr>
-            <a:spLocks noGrp="1"/>
-          </p:cNvSpPr>
-          <p:nvPr/>
-        </p:nvSpPr>
-        <p:spPr>
-          <a:xfrm>
-            <a:off x="5612424" y="3581400"/>
-            <a:ext cx="1466849" cy="552450"/>
-          </a:xfrm>
-          <a:prstGeom prst="rect">
-            <a:avLst/>
-          </a:prstGeom>
-          <a:noFill/>
-          <a:ln w="0">
-            <a:noFill/>
-          </a:ln>
-        </p:spPr>
-        <p:txBody>
-          <a:bodyPr>
-            <a:noAutofit/>
-          </a:bodyPr>
-          <a:lstStyle/>
-          <a:p>
-            <a:pPr>
-              <a:defRPr sz="1500" b="1" i="0">
-                <a:solidFill>
-                  <a:srgbClr val="FFF8EA"/>
-                </a:solidFill>
-                <a:latin typeface="Noto Sans SC"/>
-                <a:ea typeface="Noto Sans SC"/>
-                <a:cs typeface="Noto Sans SC"/>
-              </a:defRPr>
-            </a:pPr>
-            <a:r>
-              <a:rPr sz="1500" b="1" i="0" dirty="0">
-                <a:solidFill>
-                  <a:srgbClr val="FFF8EA"/>
-                </a:solidFill>
-                <a:latin typeface="Noto Sans SC"/>
-                <a:ea typeface="Noto Sans SC"/>
-                <a:cs typeface="Noto Sans SC"/>
-              </a:rPr>
-              <a:t>PostgreSQL</a:t>
-            </a:r>
-          </a:p>
-        </p:txBody>
-      </p:sp>
-      <p:sp>
-        <p:nvSpPr>
-          <p:cNvPr id="16" name="矩形 15">
-            <a:extLst>
-              <a:ext uri="{FF2B5EF4-FFF2-40B4-BE49-F238E27FC236}">
-                <a16:creationId xmlns:a16="http://schemas.microsoft.com/office/drawing/2014/main" id="{C4B7FC8B-D256-44DE-AE72-3804AE18611E}"/>
-              </a:ext>
-            </a:extLst>
-          </p:cNvPr>
-          <p:cNvSpPr>
-            <a:spLocks noGrp="1"/>
-          </p:cNvSpPr>
-          <p:nvPr/>
-        </p:nvSpPr>
-        <p:spPr>
-          <a:xfrm>
-            <a:off x="5612424" y="4181238"/>
-            <a:ext cx="1466850" cy="533400"/>
-          </a:xfrm>
-          <a:prstGeom prst="rect">
-            <a:avLst/>
-          </a:prstGeom>
-          <a:noFill/>
-          <a:ln w="0">
-            <a:noFill/>
-          </a:ln>
-        </p:spPr>
-        <p:txBody>
-          <a:bodyPr>
-            <a:noAutofit/>
-          </a:bodyPr>
-          <a:lstStyle/>
-          <a:p>
-            <a:pPr>
-              <a:defRPr sz="1125" b="0" i="0">
-                <a:solidFill>
-                  <a:srgbClr val="D6C9B2"/>
-                </a:solidFill>
-                <a:latin typeface="Noto Sans SC"/>
-                <a:ea typeface="Noto Sans SC"/>
-                <a:cs typeface="Noto Sans SC"/>
-              </a:defRPr>
-            </a:pPr>
-            <a:r>
-              <a:rPr sz="1125" b="0" i="0" dirty="0" err="1">
-                <a:solidFill>
-                  <a:srgbClr val="D6C9B2"/>
-                </a:solidFill>
-                <a:latin typeface="Noto Sans SC"/>
-                <a:ea typeface="Noto Sans SC"/>
-                <a:cs typeface="Noto Sans SC"/>
-              </a:rPr>
-              <a:t>保存用户、兴趣、信息、活动与地点</a:t>
-            </a:r>
-            <a:endParaRPr sz="1125" b="0" i="0" dirty="0">
-              <a:solidFill>
-                <a:srgbClr val="D6C9B2"/>
-              </a:solidFill>
-              <a:latin typeface="Noto Sans SC"/>
-              <a:ea typeface="Noto Sans SC"/>
-              <a:cs typeface="Noto Sans SC"/>
-            </a:endParaRPr>
-          </a:p>
-        </p:txBody>
-      </p:sp>
-      <p:sp>
-        <p:nvSpPr>
-          <p:cNvPr id="17" name="矩形 16">
-            <a:extLst>
-              <a:ext uri="{FF2B5EF4-FFF2-40B4-BE49-F238E27FC236}">
-                <a16:creationId xmlns:a16="http://schemas.microsoft.com/office/drawing/2014/main" id="{BBCFCACA-675F-4A04-8919-41AD9C7D21BE}"/>
-              </a:ext>
-            </a:extLst>
-          </p:cNvPr>
-          <p:cNvSpPr>
-            <a:spLocks noGrp="1"/>
-          </p:cNvSpPr>
-          <p:nvPr/>
-        </p:nvSpPr>
-        <p:spPr>
-          <a:xfrm>
-            <a:off x="6317275" y="2876550"/>
-            <a:ext cx="1619250" cy="19050"/>
-          </a:xfrm>
-          <a:prstGeom prst="rect">
-            <a:avLst/>
-          </a:prstGeom>
-          <a:solidFill>
-            <a:srgbClr val="52616A"/>
-          </a:solidFill>
-          <a:ln w="0">
-            <a:noFill/>
-          </a:ln>
-        </p:spPr>
-      </p:sp>
-      <p:sp>
-        <p:nvSpPr>
-          <p:cNvPr id="18" name="椭圆 17">
-            <a:extLst>
-              <a:ext uri="{FF2B5EF4-FFF2-40B4-BE49-F238E27FC236}">
-                <a16:creationId xmlns:a16="http://schemas.microsoft.com/office/drawing/2014/main" id="{5A8A9414-52BC-4C57-8356-3ECD98D28DE2}"/>
-              </a:ext>
-            </a:extLst>
-          </p:cNvPr>
-          <p:cNvSpPr>
-            <a:spLocks noGrp="1"/>
-          </p:cNvSpPr>
-          <p:nvPr/>
-        </p:nvSpPr>
-        <p:spPr>
-          <a:xfrm>
-            <a:off x="8041300" y="2686050"/>
-            <a:ext cx="400050" cy="400050"/>
-          </a:xfrm>
-          <a:prstGeom prst="ellipse">
-            <a:avLst/>
-          </a:prstGeom>
-          <a:solidFill>
-            <a:srgbClr val="112D3A"/>
-          </a:solidFill>
-          <a:ln w="9525">
-            <a:solidFill>
-              <a:srgbClr val="F5B56A"/>
-            </a:solidFill>
-            <a:prstDash val="solid"/>
-          </a:ln>
-        </p:spPr>
-      </p:sp>
-      <p:sp>
-        <p:nvSpPr>
-          <p:cNvPr id="19" name="矩形 18">
-            <a:extLst>
-              <a:ext uri="{FF2B5EF4-FFF2-40B4-BE49-F238E27FC236}">
-                <a16:creationId xmlns:a16="http://schemas.microsoft.com/office/drawing/2014/main" id="{A3D70773-E754-4B6D-86D8-FB79597DA8FE}"/>
-              </a:ext>
-            </a:extLst>
-          </p:cNvPr>
-          <p:cNvSpPr>
-            <a:spLocks noGrp="1"/>
-          </p:cNvSpPr>
-          <p:nvPr/>
-        </p:nvSpPr>
-        <p:spPr>
-          <a:xfrm>
-            <a:off x="7965100" y="3190875"/>
-            <a:ext cx="571500" cy="171450"/>
-          </a:xfrm>
-          <a:prstGeom prst="rect">
-            <a:avLst/>
-          </a:prstGeom>
-          <a:noFill/>
-          <a:ln w="0">
-            <a:noFill/>
-          </a:ln>
-        </p:spPr>
-        <p:txBody>
-          <a:bodyPr>
-            <a:noAutofit/>
-          </a:bodyPr>
-          <a:lstStyle/>
-          <a:p>
-            <a:pPr>
-              <a:defRPr sz="825" b="1" i="0">
-                <a:solidFill>
-                  <a:srgbClr val="9DA9AE"/>
-                </a:solidFill>
-                <a:latin typeface="Consolas"/>
-                <a:ea typeface="Consolas"/>
-                <a:cs typeface="Consolas"/>
-              </a:defRPr>
-            </a:pPr>
-            <a:r>
-              <a:rPr sz="825" b="1" i="0">
-                <a:solidFill>
-                  <a:srgbClr val="9DA9AE"/>
-                </a:solidFill>
-                <a:latin typeface="Consolas"/>
-                <a:ea typeface="Consolas"/>
-                <a:cs typeface="Consolas"/>
-              </a:rPr>
-              <a:t>后续</a:t>
-            </a:r>
-          </a:p>
-        </p:txBody>
-      </p:sp>
-      <p:sp>
-        <p:nvSpPr>
-          <p:cNvPr id="20" name="矩形 19">
-            <a:extLst>
-              <a:ext uri="{FF2B5EF4-FFF2-40B4-BE49-F238E27FC236}">
-                <a16:creationId xmlns:a16="http://schemas.microsoft.com/office/drawing/2014/main" id="{34865F30-4BF2-43FD-9047-D347921C8F94}"/>
-              </a:ext>
-            </a:extLst>
-          </p:cNvPr>
-          <p:cNvSpPr>
-            <a:spLocks noGrp="1"/>
-          </p:cNvSpPr>
-          <p:nvPr/>
-        </p:nvSpPr>
-        <p:spPr>
-          <a:xfrm>
-            <a:off x="7755549" y="3581400"/>
-            <a:ext cx="1466849" cy="552450"/>
-          </a:xfrm>
-          <a:prstGeom prst="rect">
-            <a:avLst/>
-          </a:prstGeom>
-          <a:noFill/>
-          <a:ln w="0">
-            <a:noFill/>
-          </a:ln>
-        </p:spPr>
-        <p:txBody>
-          <a:bodyPr>
-            <a:noAutofit/>
-          </a:bodyPr>
-          <a:lstStyle/>
-          <a:p>
-            <a:pPr>
-              <a:defRPr sz="1500" b="1" i="0">
-                <a:solidFill>
-                  <a:srgbClr val="FFF8EA"/>
-                </a:solidFill>
-                <a:latin typeface="Noto Sans SC"/>
-                <a:ea typeface="Noto Sans SC"/>
-                <a:cs typeface="Noto Sans SC"/>
-              </a:defRPr>
-            </a:pPr>
-            <a:r>
-              <a:rPr sz="1500" b="1" i="0" dirty="0" err="1">
-                <a:solidFill>
-                  <a:srgbClr val="FFF8EA"/>
-                </a:solidFill>
-                <a:latin typeface="Noto Sans SC"/>
-                <a:ea typeface="Noto Sans SC"/>
-                <a:cs typeface="Noto Sans SC"/>
-              </a:rPr>
-              <a:t>SQLAlchemy</a:t>
-            </a:r>
-            <a:r>
-              <a:rPr sz="1500" b="1" i="0" dirty="0">
-                <a:solidFill>
-                  <a:srgbClr val="FFF8EA"/>
-                </a:solidFill>
-                <a:latin typeface="Noto Sans SC"/>
-                <a:ea typeface="Noto Sans SC"/>
-                <a:cs typeface="Noto Sans SC"/>
-              </a:rPr>
-              <a:t> + Alembic</a:t>
-            </a:r>
-          </a:p>
-        </p:txBody>
-      </p:sp>
-      <p:sp>
-        <p:nvSpPr>
-          <p:cNvPr id="21" name="矩形 20">
-            <a:extLst>
-              <a:ext uri="{FF2B5EF4-FFF2-40B4-BE49-F238E27FC236}">
-                <a16:creationId xmlns:a16="http://schemas.microsoft.com/office/drawing/2014/main" id="{DE731F07-942C-4A9D-92F6-277C878780C5}"/>
-              </a:ext>
-            </a:extLst>
-          </p:cNvPr>
-          <p:cNvSpPr>
-            <a:spLocks noGrp="1"/>
-          </p:cNvSpPr>
-          <p:nvPr/>
-        </p:nvSpPr>
-        <p:spPr>
-          <a:xfrm>
-            <a:off x="7755548" y="4200525"/>
-            <a:ext cx="1466850" cy="533400"/>
-          </a:xfrm>
-          <a:prstGeom prst="rect">
-            <a:avLst/>
-          </a:prstGeom>
-          <a:noFill/>
-          <a:ln w="0">
-            <a:noFill/>
-          </a:ln>
-        </p:spPr>
-        <p:txBody>
-          <a:bodyPr>
-            <a:noAutofit/>
-          </a:bodyPr>
-          <a:lstStyle/>
-          <a:p>
-            <a:pPr>
-              <a:defRPr sz="1125" b="0" i="0">
-                <a:solidFill>
-                  <a:srgbClr val="D6C9B2"/>
-                </a:solidFill>
-                <a:latin typeface="Noto Sans SC"/>
-                <a:ea typeface="Noto Sans SC"/>
-                <a:cs typeface="Noto Sans SC"/>
-              </a:defRPr>
-            </a:pPr>
-            <a:r>
-              <a:rPr sz="1125" b="0" i="0" dirty="0" err="1">
-                <a:solidFill>
-                  <a:srgbClr val="D6C9B2"/>
-                </a:solidFill>
-                <a:latin typeface="Noto Sans SC"/>
-                <a:ea typeface="Noto Sans SC"/>
-                <a:cs typeface="Noto Sans SC"/>
-              </a:rPr>
-              <a:t>读写数据库，并记录表结构如何演进</a:t>
-            </a:r>
-            <a:endParaRPr sz="1125" b="0" i="0" dirty="0">
-              <a:solidFill>
-                <a:srgbClr val="D6C9B2"/>
-              </a:solidFill>
-              <a:latin typeface="Noto Sans SC"/>
-              <a:ea typeface="Noto Sans SC"/>
-              <a:cs typeface="Noto Sans SC"/>
-            </a:endParaRPr>
-          </a:p>
-        </p:txBody>
-      </p:sp>
-      <p:sp>
-        <p:nvSpPr>
-          <p:cNvPr id="22" name="矩形 21">
-            <a:extLst>
-              <a:ext uri="{FF2B5EF4-FFF2-40B4-BE49-F238E27FC236}">
-                <a16:creationId xmlns:a16="http://schemas.microsoft.com/office/drawing/2014/main" id="{F336AE0D-EB68-43C8-9D75-F8A468E1763E}"/>
-              </a:ext>
-            </a:extLst>
-          </p:cNvPr>
-          <p:cNvSpPr>
-            <a:spLocks noGrp="1"/>
-          </p:cNvSpPr>
-          <p:nvPr/>
-        </p:nvSpPr>
-        <p:spPr>
-          <a:xfrm>
-            <a:off x="8460400" y="2876550"/>
-            <a:ext cx="1619250" cy="19050"/>
-          </a:xfrm>
-          <a:prstGeom prst="rect">
-            <a:avLst/>
-          </a:prstGeom>
-          <a:solidFill>
-            <a:srgbClr val="52616A"/>
-          </a:solidFill>
-          <a:ln w="0">
-            <a:noFill/>
-          </a:ln>
-        </p:spPr>
-      </p:sp>
-      <p:sp>
-        <p:nvSpPr>
-          <p:cNvPr id="23" name="椭圆 22">
-            <a:extLst>
-              <a:ext uri="{FF2B5EF4-FFF2-40B4-BE49-F238E27FC236}">
-                <a16:creationId xmlns:a16="http://schemas.microsoft.com/office/drawing/2014/main" id="{4BE20FE0-A4DE-44C1-9AC6-9E8FB7B84E45}"/>
-              </a:ext>
-            </a:extLst>
-          </p:cNvPr>
-          <p:cNvSpPr>
-            <a:spLocks noGrp="1"/>
-          </p:cNvSpPr>
-          <p:nvPr/>
-        </p:nvSpPr>
-        <p:spPr>
-          <a:xfrm>
-            <a:off x="10184425" y="2686050"/>
-            <a:ext cx="400050" cy="400050"/>
-          </a:xfrm>
-          <a:prstGeom prst="ellipse">
-            <a:avLst/>
-          </a:prstGeom>
-          <a:solidFill>
-            <a:srgbClr val="112D3A"/>
-          </a:solidFill>
-          <a:ln w="9525">
-            <a:solidFill>
-              <a:srgbClr val="F5B56A"/>
-            </a:solidFill>
-            <a:prstDash val="solid"/>
-          </a:ln>
-        </p:spPr>
-      </p:sp>
-      <p:sp>
-        <p:nvSpPr>
-          <p:cNvPr id="24" name="矩形 23">
-            <a:extLst>
-              <a:ext uri="{FF2B5EF4-FFF2-40B4-BE49-F238E27FC236}">
-                <a16:creationId xmlns:a16="http://schemas.microsoft.com/office/drawing/2014/main" id="{7BF93599-688E-4833-AF89-8768E548FBC9}"/>
-              </a:ext>
-            </a:extLst>
-          </p:cNvPr>
-          <p:cNvSpPr>
-            <a:spLocks noGrp="1"/>
-          </p:cNvSpPr>
-          <p:nvPr/>
-        </p:nvSpPr>
-        <p:spPr>
-          <a:xfrm>
-            <a:off x="10108225" y="3190875"/>
-            <a:ext cx="571500" cy="171450"/>
-          </a:xfrm>
-          <a:prstGeom prst="rect">
-            <a:avLst/>
-          </a:prstGeom>
-          <a:noFill/>
-          <a:ln w="0">
-            <a:noFill/>
-          </a:ln>
-        </p:spPr>
-        <p:txBody>
-          <a:bodyPr>
-            <a:noAutofit/>
-          </a:bodyPr>
-          <a:lstStyle/>
-          <a:p>
-            <a:pPr>
-              <a:defRPr sz="825" b="1" i="0">
-                <a:solidFill>
-                  <a:srgbClr val="9DA9AE"/>
-                </a:solidFill>
-                <a:latin typeface="Consolas"/>
-                <a:ea typeface="Consolas"/>
-                <a:cs typeface="Consolas"/>
-              </a:defRPr>
-            </a:pPr>
-            <a:r>
-              <a:rPr sz="825" b="1" i="0">
-                <a:solidFill>
-                  <a:srgbClr val="9DA9AE"/>
-                </a:solidFill>
-                <a:latin typeface="Consolas"/>
-                <a:ea typeface="Consolas"/>
-                <a:cs typeface="Consolas"/>
-              </a:rPr>
-              <a:t>后续</a:t>
-            </a:r>
-          </a:p>
-        </p:txBody>
-      </p:sp>
-      <p:sp>
-        <p:nvSpPr>
-          <p:cNvPr id="25" name="矩形 24">
-            <a:extLst>
-              <a:ext uri="{FF2B5EF4-FFF2-40B4-BE49-F238E27FC236}">
-                <a16:creationId xmlns:a16="http://schemas.microsoft.com/office/drawing/2014/main" id="{497B5A57-8592-42DB-9E31-A7313FB88C1D}"/>
-              </a:ext>
-            </a:extLst>
-          </p:cNvPr>
-          <p:cNvSpPr>
-            <a:spLocks noGrp="1"/>
-          </p:cNvSpPr>
-          <p:nvPr/>
-        </p:nvSpPr>
-        <p:spPr>
-          <a:xfrm>
-            <a:off x="9898675" y="3581400"/>
-            <a:ext cx="971550" cy="552450"/>
-          </a:xfrm>
-          <a:prstGeom prst="rect">
-            <a:avLst/>
-          </a:prstGeom>
-          <a:noFill/>
-          <a:ln w="0">
-            <a:noFill/>
-          </a:ln>
-        </p:spPr>
-        <p:txBody>
-          <a:bodyPr>
-            <a:noAutofit/>
-          </a:bodyPr>
-          <a:lstStyle/>
-          <a:p>
-            <a:pPr>
-              <a:defRPr sz="1500" b="1" i="0">
-                <a:solidFill>
-                  <a:srgbClr val="FFF8EA"/>
-                </a:solidFill>
-                <a:latin typeface="Noto Sans SC"/>
-                <a:ea typeface="Noto Sans SC"/>
-                <a:cs typeface="Noto Sans SC"/>
-              </a:defRPr>
-            </a:pPr>
-            <a:r>
-              <a:rPr sz="1500" b="1" i="0">
-                <a:solidFill>
-                  <a:srgbClr val="FFF8EA"/>
-                </a:solidFill>
-                <a:latin typeface="Noto Sans SC"/>
-                <a:ea typeface="Noto Sans SC"/>
-                <a:cs typeface="Noto Sans SC"/>
-              </a:rPr>
-              <a:t>Python Worker</a:t>
-            </a:r>
-          </a:p>
-        </p:txBody>
-      </p:sp>
-      <p:sp>
-        <p:nvSpPr>
-          <p:cNvPr id="26" name="矩形 25">
-            <a:extLst>
-              <a:ext uri="{FF2B5EF4-FFF2-40B4-BE49-F238E27FC236}">
-                <a16:creationId xmlns:a16="http://schemas.microsoft.com/office/drawing/2014/main" id="{C2A31201-6F83-422E-87D5-06E38D5B6844}"/>
-              </a:ext>
-            </a:extLst>
-          </p:cNvPr>
-          <p:cNvSpPr>
-            <a:spLocks noGrp="1"/>
-          </p:cNvSpPr>
-          <p:nvPr/>
-        </p:nvSpPr>
-        <p:spPr>
-          <a:xfrm>
-            <a:off x="9651025" y="4248150"/>
-            <a:ext cx="1466850" cy="533400"/>
-          </a:xfrm>
-          <a:prstGeom prst="rect">
-            <a:avLst/>
-          </a:prstGeom>
-          <a:noFill/>
-          <a:ln w="0">
-            <a:noFill/>
-          </a:ln>
-        </p:spPr>
-        <p:txBody>
-          <a:bodyPr>
-            <a:noAutofit/>
-          </a:bodyPr>
-          <a:lstStyle/>
-          <a:p>
-            <a:pPr>
-              <a:defRPr sz="1125" b="0" i="0">
-                <a:solidFill>
-                  <a:srgbClr val="D6C9B2"/>
-                </a:solidFill>
-                <a:latin typeface="Noto Sans SC"/>
-                <a:ea typeface="Noto Sans SC"/>
-                <a:cs typeface="Noto Sans SC"/>
-              </a:defRPr>
-            </a:pPr>
-            <a:r>
-              <a:rPr sz="1125" b="0" i="0">
-                <a:solidFill>
-                  <a:srgbClr val="D6C9B2"/>
-                </a:solidFill>
-                <a:latin typeface="Noto Sans SC"/>
-                <a:ea typeface="Noto Sans SC"/>
-                <a:cs typeface="Noto Sans SC"/>
-              </a:rPr>
-              <a:t>在后台采集、去重、推荐与提醒</a:t>
-            </a:r>
-          </a:p>
-        </p:txBody>
+          <a:ln w="0">
+            <a:noFill/>
+          </a:ln>
+        </p:spPr>
       </p:sp>
     </p:spTree>
     <p:extLst>
       <p:ext uri="{BB962C8B-B14F-4D97-AF65-F5344CB8AC3E}">
-        <p14:creationId xmlns:p14="http://schemas.microsoft.com/office/powerpoint/2010/main" val="36930225"/>
-      </p:ext>
-    </p:extLst>
-  </p:cSld>
-  <p:clrMapOvr>
-    <a:masterClrMapping/>
-  </p:clrMapOvr>
-</p:sld>
-</file>
-
-<file path=ppt/slides/slide9.xml><?xml version="1.0" encoding="utf-8"?>
-<p:sld xmlns:a="http://schemas.openxmlformats.org/drawingml/2006/main" xmlns:r="http://schemas.openxmlformats.org/officeDocument/2006/relationships" xmlns:p="http://schemas.openxmlformats.org/presentationml/2006/main">
-  <p:cSld>
-    <p:bg>
-      <p:bgPr>
-        <a:solidFill>
-          <a:srgbClr val="F7F0DF"/>
-        </a:solidFill>
-        <a:effectLst/>
-      </p:bgPr>
-    </p:bg>
-    <p:spTree>
-      <p:nvGrpSpPr>
-        <p:cNvPr id="1" name=""/>
-        <p:cNvGrpSpPr/>
-        <p:nvPr/>
-      </p:nvGrpSpPr>
-      <p:grpSpPr>
-        <a:xfrm>
-          <a:off x="0" y="0"/>
-          <a:ext cx="0" cy="0"/>
-          <a:chOff x="0" y="0"/>
-          <a:chExt cx="0" cy="0"/>
-        </a:xfrm>
-      </p:grpSpPr>
-      <p:sp>
-        <p:nvSpPr>
-          <p:cNvPr id="2" name="矩形 1">
-            <a:extLst>
-              <a:ext uri="{FF2B5EF4-FFF2-40B4-BE49-F238E27FC236}">
-                <a16:creationId xmlns:a16="http://schemas.microsoft.com/office/drawing/2014/main" id="{05D2B85D-09F5-4194-994C-D5732DF19D65}"/>
-              </a:ext>
-            </a:extLst>
-          </p:cNvPr>
-          <p:cNvSpPr>
-            <a:spLocks noGrp="1"/>
-          </p:cNvSpPr>
-          <p:nvPr/>
-        </p:nvSpPr>
-        <p:spPr>
-          <a:xfrm>
-            <a:off x="914400" y="2762250"/>
-            <a:ext cx="10363200" cy="1047750"/>
-          </a:xfrm>
-          <a:prstGeom prst="rect">
-            <a:avLst/>
-          </a:prstGeom>
-          <a:noFill/>
-          <a:ln w="0">
-            <a:noFill/>
-          </a:ln>
-        </p:spPr>
-        <p:txBody>
-          <a:bodyPr>
-            <a:noAutofit/>
-          </a:bodyPr>
-          <a:lstStyle/>
-          <a:p>
-            <a:pPr>
-              <a:defRPr sz="4800" b="1" i="0">
-                <a:solidFill>
-                  <a:srgbClr val="142431"/>
-                </a:solidFill>
-                <a:latin typeface="Noto Serif SC"/>
-                <a:ea typeface="Noto Serif SC"/>
-                <a:cs typeface="Noto Serif SC"/>
-              </a:defRPr>
-            </a:pPr>
-            <a:r>
-              <a:rPr sz="4800" b="1" i="0">
-                <a:solidFill>
-                  <a:srgbClr val="142431"/>
-                </a:solidFill>
-                <a:latin typeface="Noto Serif SC"/>
-                <a:ea typeface="Noto Serif SC"/>
-                <a:cs typeface="Noto Serif SC"/>
-              </a:rPr>
-              <a:t>团队/项目协作</a:t>
-            </a:r>
-          </a:p>
-        </p:txBody>
-      </p:sp>
-    </p:spTree>
-    <p:extLst>
-      <p:ext uri="{BB962C8B-B14F-4D97-AF65-F5344CB8AC3E}">
-        <p14:creationId xmlns:p14="http://schemas.microsoft.com/office/powerpoint/2010/main" val="1329907950"/>
+        <p14:creationId xmlns:p14="http://schemas.microsoft.com/office/powerpoint/2010/main" val="919422967"/>
       </p:ext>
     </p:extLst>
   </p:cSld>
